--- a/Italy Road Accident Risk Analysis.pptx
+++ b/Italy Road Accident Risk Analysis.pptx
@@ -96,8 +96,8 @@
         </p:nvSpPr>
         <p:spPr>
           <a:xfrm>
-            <a:off x="504000" y="226080"/>
-            <a:ext cx="9071640" cy="946440"/>
+            <a:off x="504000" y="28800"/>
+            <a:ext cx="9071280" cy="1341000"/>
           </a:xfrm>
           <a:prstGeom prst="rect">
             <a:avLst/>
@@ -114,6 +114,9 @@
           <a:p>
             <a:pPr indent="0" algn="ctr">
               <a:buNone/>
+              <a:tabLst>
+                <a:tab pos="0" algn="l"/>
+              </a:tabLst>
             </a:pPr>
             <a:endParaRPr lang="it-IT" sz="4400" b="0" u="none" strike="noStrike">
               <a:solidFill>
@@ -138,8 +141,8 @@
         </p:nvSpPr>
         <p:spPr>
           <a:xfrm>
-            <a:off x="504000" y="1326600"/>
-            <a:ext cx="9071640" cy="3288240"/>
+            <a:off x="504000" y="2726280"/>
+            <a:ext cx="9071280" cy="488160"/>
           </a:xfrm>
           <a:prstGeom prst="rect">
             <a:avLst/>
@@ -175,7 +178,7 @@
             <a:spLocks noGrp="1"/>
           </p:cNvSpPr>
           <p:nvPr>
-            <p:ph type="ftr" idx="2"/>
+            <p:ph type="ftr" idx="1"/>
           </p:nvPr>
         </p:nvSpPr>
         <p:spPr/>
@@ -195,14 +198,14 @@
             <a:spLocks noGrp="1"/>
           </p:cNvSpPr>
           <p:nvPr>
-            <p:ph type="sldNum" idx="3"/>
+            <p:ph type="sldNum" idx="2"/>
           </p:nvPr>
         </p:nvSpPr>
         <p:spPr/>
         <p:txBody>
           <a:bodyPr/>
           <a:p>
-            <a:fld id="{D1E49B8A-8D1A-4FE8-849B-C9230050166D}" type="slidenum">
+            <a:fld id="{4907519F-695A-43B8-806F-FAEBBD4B0CAF}" type="slidenum">
               <a:t>&lt;#&gt;</a:t>
             </a:fld>
           </a:p>
@@ -215,7 +218,7 @@
             <a:spLocks noGrp="1"/>
           </p:cNvSpPr>
           <p:nvPr>
-            <p:ph type="dt" idx="1"/>
+            <p:ph type="dt" idx="3"/>
           </p:nvPr>
         </p:nvSpPr>
         <p:spPr/>
@@ -263,8 +266,8 @@
         </p:nvSpPr>
         <p:spPr>
           <a:xfrm>
-            <a:off x="504000" y="226080"/>
-            <a:ext cx="9071640" cy="946440"/>
+            <a:off x="504000" y="28800"/>
+            <a:ext cx="9071280" cy="1341000"/>
           </a:xfrm>
           <a:prstGeom prst="rect">
             <a:avLst/>
@@ -276,11 +279,14 @@
         </p:spPr>
         <p:txBody>
           <a:bodyPr lIns="0" tIns="0" rIns="0" bIns="0" anchor="ctr">
-            <a:noAutofit/>
+            <a:spAutoFit/>
           </a:bodyPr>
           <a:lstStyle>
-            <a:lvl1pPr indent="0" algn="ctr">
+            <a:lvl1pPr indent="0" algn="l">
               <a:buNone/>
+              <a:tabLst>
+                <a:tab pos="0" algn="l"/>
+              </a:tabLst>
               <a:defRPr lang="it-IT" sz="4400" b="0" u="none" strike="noStrike">
                 <a:solidFill>
                   <a:srgbClr val="000000"/>
@@ -292,8 +298,11 @@
             </a:lvl1pPr>
           </a:lstStyle>
           <a:p>
-            <a:pPr indent="0" algn="ctr">
+            <a:pPr indent="0" algn="l">
               <a:buNone/>
+              <a:tabLst>
+                <a:tab pos="0" algn="l"/>
+              </a:tabLst>
             </a:pPr>
             <a:r>
               <a:rPr lang="it-IT" sz="4400" b="0" u="none" strike="noStrike">
@@ -324,13 +333,235 @@
             <a:spLocks noGrp="1"/>
           </p:cNvSpPr>
           <p:nvPr>
+            <p:ph type="ftr" idx="1"/>
+          </p:nvPr>
+        </p:nvSpPr>
+        <p:spPr>
+          <a:xfrm>
+            <a:off x="3447360" y="5165280"/>
+            <a:ext cx="3194640" cy="390240"/>
+          </a:xfrm>
+          <a:prstGeom prst="rect">
+            <a:avLst/>
+          </a:prstGeom>
+          <a:noFill/>
+          <a:ln w="0">
+            <a:noFill/>
+          </a:ln>
+        </p:spPr>
+        <p:txBody>
+          <a:bodyPr lIns="0" tIns="0" rIns="0" bIns="0" anchor="t">
+            <a:noAutofit/>
+          </a:bodyPr>
+          <a:lstStyle>
+            <a:lvl1pPr indent="0" algn="ctr">
+              <a:lnSpc>
+                <a:spcPct val="100000"/>
+              </a:lnSpc>
+              <a:buNone/>
+              <a:tabLst>
+                <a:tab pos="0" algn="l"/>
+              </a:tabLst>
+              <a:defRPr lang="it-IT" sz="1400" b="0" u="none" strike="noStrike">
+                <a:solidFill>
+                  <a:srgbClr val="000000"/>
+                </a:solidFill>
+                <a:effectLst/>
+                <a:uFillTx/>
+                <a:latin typeface="Times New Roman"/>
+              </a:defRPr>
+            </a:lvl1pPr>
+          </a:lstStyle>
+          <a:p>
+            <a:pPr indent="0" algn="ctr">
+              <a:lnSpc>
+                <a:spcPct val="100000"/>
+              </a:lnSpc>
+              <a:buNone/>
+              <a:tabLst>
+                <a:tab pos="0" algn="l"/>
+              </a:tabLst>
+            </a:pPr>
+            <a:r>
+              <a:rPr lang="it-IT" sz="1400" b="0" u="none" strike="noStrike">
+                <a:solidFill>
+                  <a:srgbClr val="000000"/>
+                </a:solidFill>
+                <a:effectLst/>
+                <a:uFillTx/>
+                <a:latin typeface="Times New Roman"/>
+              </a:rPr>
+              <a:t>&lt;piè di pagina&gt;</a:t>
+            </a:r>
+            <a:endParaRPr lang="it-IT" sz="1400" b="0" u="none" strike="noStrike">
+              <a:solidFill>
+                <a:srgbClr val="000000"/>
+              </a:solidFill>
+              <a:effectLst/>
+              <a:uFillTx/>
+              <a:latin typeface="Times New Roman"/>
+            </a:endParaRPr>
+          </a:p>
+        </p:txBody>
+      </p:sp>
+      <p:sp>
+        <p:nvSpPr>
+          <p:cNvPr id="4" name="PlaceHolder 3"/>
+          <p:cNvSpPr>
+            <a:spLocks noGrp="1"/>
+          </p:cNvSpPr>
+          <p:nvPr>
+            <p:ph type="sldNum" idx="2"/>
+          </p:nvPr>
+        </p:nvSpPr>
+        <p:spPr>
+          <a:xfrm>
+            <a:off x="7227360" y="5165280"/>
+            <a:ext cx="2347920" cy="390240"/>
+          </a:xfrm>
+          <a:prstGeom prst="rect">
+            <a:avLst/>
+          </a:prstGeom>
+          <a:noFill/>
+          <a:ln w="0">
+            <a:noFill/>
+          </a:ln>
+        </p:spPr>
+        <p:txBody>
+          <a:bodyPr lIns="0" tIns="0" rIns="0" bIns="0" anchor="t">
+            <a:noAutofit/>
+          </a:bodyPr>
+          <a:lstStyle>
+            <a:lvl1pPr indent="0" algn="r">
+              <a:lnSpc>
+                <a:spcPct val="100000"/>
+              </a:lnSpc>
+              <a:buNone/>
+              <a:tabLst>
+                <a:tab pos="0" algn="l"/>
+              </a:tabLst>
+              <a:defRPr lang="it-IT" sz="1400" b="0" u="none" strike="noStrike">
+                <a:solidFill>
+                  <a:srgbClr val="000000"/>
+                </a:solidFill>
+                <a:effectLst/>
+                <a:uFillTx/>
+                <a:latin typeface="Times New Roman"/>
+              </a:defRPr>
+            </a:lvl1pPr>
+          </a:lstStyle>
+          <a:p>
+            <a:pPr indent="0" algn="r">
+              <a:lnSpc>
+                <a:spcPct val="100000"/>
+              </a:lnSpc>
+              <a:buNone/>
+              <a:tabLst>
+                <a:tab pos="0" algn="l"/>
+              </a:tabLst>
+            </a:pPr>
+            <a:fld id="{CB325285-8918-4791-B6E1-DE30E55D7A31}" type="slidenum">
+              <a:rPr lang="it-IT" sz="1400" b="0" u="none" strike="noStrike">
+                <a:solidFill>
+                  <a:srgbClr val="000000"/>
+                </a:solidFill>
+                <a:effectLst/>
+                <a:uFillTx/>
+                <a:latin typeface="Times New Roman"/>
+              </a:rPr>
+              <a:t>&lt;numero&gt;</a:t>
+            </a:fld>
+            <a:endParaRPr lang="it-IT" sz="1400" b="0" u="none" strike="noStrike">
+              <a:solidFill>
+                <a:srgbClr val="000000"/>
+              </a:solidFill>
+              <a:effectLst/>
+              <a:uFillTx/>
+              <a:latin typeface="Times New Roman"/>
+            </a:endParaRPr>
+          </a:p>
+        </p:txBody>
+      </p:sp>
+      <p:sp>
+        <p:nvSpPr>
+          <p:cNvPr id="5" name="PlaceHolder 4"/>
+          <p:cNvSpPr>
+            <a:spLocks noGrp="1"/>
+          </p:cNvSpPr>
+          <p:nvPr>
+            <p:ph type="dt" idx="3"/>
+          </p:nvPr>
+        </p:nvSpPr>
+        <p:spPr>
+          <a:xfrm>
+            <a:off x="504000" y="5165280"/>
+            <a:ext cx="2347920" cy="390240"/>
+          </a:xfrm>
+          <a:prstGeom prst="rect">
+            <a:avLst/>
+          </a:prstGeom>
+          <a:noFill/>
+          <a:ln w="0">
+            <a:noFill/>
+          </a:ln>
+        </p:spPr>
+        <p:txBody>
+          <a:bodyPr lIns="0" tIns="0" rIns="0" bIns="0" anchor="t">
+            <a:noAutofit/>
+          </a:bodyPr>
+          <a:lstStyle>
+            <a:lvl1pPr indent="0" algn="l">
+              <a:buNone/>
+              <a:defRPr lang="it-IT" sz="1400" b="0" u="none" strike="noStrike">
+                <a:solidFill>
+                  <a:srgbClr val="000000"/>
+                </a:solidFill>
+                <a:effectLst/>
+                <a:uFillTx/>
+                <a:latin typeface="Times New Roman"/>
+              </a:defRPr>
+            </a:lvl1pPr>
+          </a:lstStyle>
+          <a:p>
+            <a:pPr indent="0" algn="l">
+              <a:buNone/>
+            </a:pPr>
+            <a:r>
+              <a:rPr lang="it-IT" sz="1400" b="0" u="none" strike="noStrike">
+                <a:solidFill>
+                  <a:srgbClr val="000000"/>
+                </a:solidFill>
+                <a:effectLst/>
+                <a:uFillTx/>
+                <a:latin typeface="Times New Roman"/>
+              </a:rPr>
+              <a:t>&lt;data/ora&gt;</a:t>
+            </a:r>
+            <a:endParaRPr lang="it-IT" sz="1400" b="0" u="none" strike="noStrike">
+              <a:solidFill>
+                <a:srgbClr val="000000"/>
+              </a:solidFill>
+              <a:effectLst/>
+              <a:uFillTx/>
+              <a:latin typeface="Times New Roman"/>
+            </a:endParaRPr>
+          </a:p>
+        </p:txBody>
+      </p:sp>
+      <p:sp>
+        <p:nvSpPr>
+          <p:cNvPr id="6" name="PlaceHolder 5"/>
+          <p:cNvSpPr>
+            <a:spLocks noGrp="1"/>
+          </p:cNvSpPr>
+          <p:nvPr>
             <p:ph type="body"/>
           </p:nvPr>
         </p:nvSpPr>
         <p:spPr>
           <a:xfrm>
             <a:off x="504000" y="1326600"/>
-            <a:ext cx="9071640" cy="3288240"/>
+            <a:ext cx="9072000" cy="3288600"/>
           </a:xfrm>
           <a:prstGeom prst="rect">
             <a:avLst/>
@@ -480,7 +711,7 @@
             </a:lvl7pPr>
           </a:lstStyle>
           <a:p>
-            <a:pPr marL="432000" indent="-324000" algn="l">
+            <a:pPr indent="-324000" algn="l">
               <a:spcBef>
                 <a:spcPts val="1417"/>
               </a:spcBef>
@@ -701,204 +932,6 @@
               <a:effectLst/>
               <a:uFillTx/>
               <a:latin typeface="Arial"/>
-            </a:endParaRPr>
-          </a:p>
-        </p:txBody>
-      </p:sp>
-      <p:sp>
-        <p:nvSpPr>
-          <p:cNvPr id="4" name="PlaceHolder 3"/>
-          <p:cNvSpPr>
-            <a:spLocks noGrp="1"/>
-          </p:cNvSpPr>
-          <p:nvPr>
-            <p:ph type="dt" idx="1"/>
-          </p:nvPr>
-        </p:nvSpPr>
-        <p:spPr>
-          <a:xfrm>
-            <a:off x="504000" y="5165280"/>
-            <a:ext cx="2348280" cy="390600"/>
-          </a:xfrm>
-          <a:prstGeom prst="rect">
-            <a:avLst/>
-          </a:prstGeom>
-          <a:noFill/>
-          <a:ln w="0">
-            <a:noFill/>
-          </a:ln>
-        </p:spPr>
-        <p:txBody>
-          <a:bodyPr lIns="0" tIns="0" rIns="0" bIns="0" anchor="t">
-            <a:noAutofit/>
-          </a:bodyPr>
-          <a:lstStyle>
-            <a:lvl1pPr indent="0" algn="l">
-              <a:buNone/>
-              <a:defRPr lang="it-IT" sz="1400" b="0" u="none" strike="noStrike">
-                <a:solidFill>
-                  <a:srgbClr val="000000"/>
-                </a:solidFill>
-                <a:effectLst/>
-                <a:uFillTx/>
-                <a:latin typeface="Times New Roman"/>
-              </a:defRPr>
-            </a:lvl1pPr>
-          </a:lstStyle>
-          <a:p>
-            <a:pPr indent="0" algn="l">
-              <a:buNone/>
-            </a:pPr>
-            <a:r>
-              <a:rPr lang="it-IT" sz="1400" b="0" u="none" strike="noStrike">
-                <a:solidFill>
-                  <a:srgbClr val="000000"/>
-                </a:solidFill>
-                <a:effectLst/>
-                <a:uFillTx/>
-                <a:latin typeface="Times New Roman"/>
-              </a:rPr>
-              <a:t>&lt;data/ora&gt;</a:t>
-            </a:r>
-            <a:endParaRPr lang="it-IT" sz="1400" b="0" u="none" strike="noStrike">
-              <a:solidFill>
-                <a:srgbClr val="000000"/>
-              </a:solidFill>
-              <a:effectLst/>
-              <a:uFillTx/>
-              <a:latin typeface="Times New Roman"/>
-            </a:endParaRPr>
-          </a:p>
-        </p:txBody>
-      </p:sp>
-      <p:sp>
-        <p:nvSpPr>
-          <p:cNvPr id="5" name="PlaceHolder 4"/>
-          <p:cNvSpPr>
-            <a:spLocks noGrp="1"/>
-          </p:cNvSpPr>
-          <p:nvPr>
-            <p:ph type="ftr" idx="2"/>
-          </p:nvPr>
-        </p:nvSpPr>
-        <p:spPr>
-          <a:xfrm>
-            <a:off x="3447360" y="5165280"/>
-            <a:ext cx="3195000" cy="390600"/>
-          </a:xfrm>
-          <a:prstGeom prst="rect">
-            <a:avLst/>
-          </a:prstGeom>
-          <a:noFill/>
-          <a:ln w="0">
-            <a:noFill/>
-          </a:ln>
-        </p:spPr>
-        <p:txBody>
-          <a:bodyPr lIns="0" tIns="0" rIns="0" bIns="0" anchor="t">
-            <a:noAutofit/>
-          </a:bodyPr>
-          <a:lstStyle>
-            <a:lvl1pPr indent="0" algn="ctr">
-              <a:buNone/>
-              <a:defRPr lang="it-IT" sz="1400" b="0" u="none" strike="noStrike">
-                <a:solidFill>
-                  <a:srgbClr val="000000"/>
-                </a:solidFill>
-                <a:effectLst/>
-                <a:uFillTx/>
-                <a:latin typeface="Times New Roman"/>
-              </a:defRPr>
-            </a:lvl1pPr>
-          </a:lstStyle>
-          <a:p>
-            <a:pPr indent="0" algn="ctr">
-              <a:buNone/>
-            </a:pPr>
-            <a:r>
-              <a:rPr lang="it-IT" sz="1400" b="0" u="none" strike="noStrike">
-                <a:solidFill>
-                  <a:srgbClr val="000000"/>
-                </a:solidFill>
-                <a:effectLst/>
-                <a:uFillTx/>
-                <a:latin typeface="Times New Roman"/>
-              </a:rPr>
-              <a:t>&lt;piè di pagina&gt;</a:t>
-            </a:r>
-            <a:endParaRPr lang="it-IT" sz="1400" b="0" u="none" strike="noStrike">
-              <a:solidFill>
-                <a:srgbClr val="000000"/>
-              </a:solidFill>
-              <a:effectLst/>
-              <a:uFillTx/>
-              <a:latin typeface="Times New Roman"/>
-            </a:endParaRPr>
-          </a:p>
-        </p:txBody>
-      </p:sp>
-      <p:sp>
-        <p:nvSpPr>
-          <p:cNvPr id="6" name="PlaceHolder 5"/>
-          <p:cNvSpPr>
-            <a:spLocks noGrp="1"/>
-          </p:cNvSpPr>
-          <p:nvPr>
-            <p:ph type="sldNum" idx="3"/>
-          </p:nvPr>
-        </p:nvSpPr>
-        <p:spPr>
-          <a:xfrm>
-            <a:off x="7227360" y="5165280"/>
-            <a:ext cx="2348280" cy="390600"/>
-          </a:xfrm>
-          <a:prstGeom prst="rect">
-            <a:avLst/>
-          </a:prstGeom>
-          <a:noFill/>
-          <a:ln w="0">
-            <a:noFill/>
-          </a:ln>
-        </p:spPr>
-        <p:txBody>
-          <a:bodyPr lIns="0" tIns="0" rIns="0" bIns="0" anchor="t">
-            <a:noAutofit/>
-          </a:bodyPr>
-          <a:lstStyle>
-            <a:lvl1pPr indent="0" algn="r">
-              <a:buNone/>
-              <a:defRPr lang="it-IT" sz="1400" b="0" u="none" strike="noStrike">
-                <a:solidFill>
-                  <a:srgbClr val="000000"/>
-                </a:solidFill>
-                <a:effectLst/>
-                <a:uFillTx/>
-                <a:latin typeface="Times New Roman"/>
-              </a:defRPr>
-            </a:lvl1pPr>
-          </a:lstStyle>
-          <a:p>
-            <a:pPr indent="0" algn="r">
-              <a:buNone/>
-            </a:pPr>
-            <a:fld id="{75A16BCD-23E0-49E5-9CA5-47A93DE270D5}" type="slidenum">
-              <a:rPr lang="it-IT" sz="1400" b="0" u="none" strike="noStrike">
-                <a:solidFill>
-                  <a:srgbClr val="000000"/>
-                </a:solidFill>
-                <a:effectLst/>
-                <a:uFillTx/>
-                <a:latin typeface="Times New Roman"/>
-              </a:rPr>
-              <a:t>&lt;numero&gt;</a:t>
-            </a:fld>
-            <a:endParaRPr lang="it-IT" sz="1400" b="0" u="none" strike="noStrike">
-              <a:solidFill>
-                <a:srgbClr val="000000"/>
-              </a:solidFill>
-              <a:effectLst/>
-              <a:uFillTx/>
-              <a:latin typeface="Times New Roman"/>
             </a:endParaRPr>
           </a:p>
         </p:txBody>
@@ -941,8 +974,8 @@
         </p:nvSpPr>
         <p:spPr>
           <a:xfrm>
-            <a:off x="504000" y="225720"/>
-            <a:ext cx="9071640" cy="946440"/>
+            <a:off x="504000" y="225360"/>
+            <a:ext cx="9071280" cy="946800"/>
           </a:xfrm>
           <a:prstGeom prst="rect">
             <a:avLst/>
@@ -960,7 +993,13 @@
           </a:bodyPr>
           <a:p>
             <a:pPr indent="0" algn="l">
+              <a:lnSpc>
+                <a:spcPct val="100000"/>
+              </a:lnSpc>
               <a:buNone/>
+              <a:tabLst>
+                <a:tab pos="0" algn="l"/>
+              </a:tabLst>
             </a:pPr>
             <a:r>
               <a:rPr lang="it-IT" sz="3200" b="0" u="none" strike="noStrike">
@@ -989,11 +1028,11 @@
             </a:r>
             <a:endParaRPr lang="it-IT" sz="1500" b="0" u="none" strike="noStrike">
               <a:solidFill>
-                <a:srgbClr val="FFFFFF"/>
+                <a:srgbClr val="000000"/>
               </a:solidFill>
               <a:effectLst/>
               <a:uFillTx/>
-              <a:latin typeface="Segoe UI Semibold"/>
+              <a:latin typeface="Arial"/>
             </a:endParaRPr>
           </a:p>
         </p:txBody>
@@ -1001,13 +1040,13 @@
       <p:sp>
         <p:nvSpPr>
           <p:cNvPr id="10" name=""/>
-          <p:cNvSpPr txBox="1"/>
+          <p:cNvSpPr/>
           <p:nvPr/>
         </p:nvSpPr>
         <p:spPr>
           <a:xfrm>
             <a:off x="720000" y="1800000"/>
-            <a:ext cx="8460000" cy="2340000"/>
+            <a:ext cx="8459640" cy="2290680"/>
           </a:xfrm>
           <a:prstGeom prst="rect">
             <a:avLst/>
@@ -1017,12 +1056,21 @@
             <a:noFill/>
           </a:ln>
         </p:spPr>
+        <p:style>
+          <a:lnRef idx="0"/>
+          <a:fillRef idx="0"/>
+          <a:effectRef idx="0"/>
+          <a:fontRef idx="minor"/>
+        </p:style>
         <p:txBody>
           <a:bodyPr lIns="90000" tIns="45000" rIns="90000" bIns="45000" anchor="t">
             <a:spAutoFit/>
           </a:bodyPr>
           <a:p>
             <a:pPr marL="216000" indent="-216000">
+              <a:lnSpc>
+                <a:spcPct val="100000"/>
+              </a:lnSpc>
               <a:spcBef>
                 <a:spcPts val="1191"/>
               </a:spcBef>
@@ -1075,11 +1123,14 @@
               </a:solidFill>
               <a:effectLst/>
               <a:uFillTx/>
-              <a:latin typeface="Segoe UI Semibold"/>
+              <a:latin typeface="Arial"/>
             </a:endParaRPr>
           </a:p>
           <a:p>
             <a:pPr marL="216000" indent="-216000">
+              <a:lnSpc>
+                <a:spcPct val="100000"/>
+              </a:lnSpc>
               <a:spcBef>
                 <a:spcPts val="1191"/>
               </a:spcBef>
@@ -1113,7 +1164,7 @@
                 <a:uFillTx/>
                 <a:latin typeface="Segoe UI"/>
               </a:rPr>
-              <a:t>: Analyze historical data (2001–2024) to classify accident risk not just by frequency, but by severity </a:t>
+              <a:t>: Analyze historical data (2001–2024) to classify accident risk not just by frequency, but by severity. </a:t>
             </a:r>
             <a:endParaRPr lang="it-IT" sz="1600" b="0" u="none" strike="noStrike">
               <a:solidFill>
@@ -1126,6 +1177,9 @@
           </a:p>
           <a:p>
             <a:pPr marL="216000" indent="-216000">
+              <a:lnSpc>
+                <a:spcPct val="100000"/>
+              </a:lnSpc>
               <a:spcBef>
                 <a:spcPts val="1191"/>
               </a:spcBef>
@@ -1159,7 +1213,7 @@
                 <a:uFillTx/>
                 <a:latin typeface="Segoe UI"/>
               </a:rPr>
-              <a:t>: ~7,500 "stable" Italian town, assessing where accidents happen most and where they are most fatal</a:t>
+              <a:t>: ~7,500 "stable" Italian towns, assessing where accidents happen most and where they are most fatal.</a:t>
             </a:r>
             <a:r>
               <a:rPr lang="it-IT" sz="1000" b="0" u="none" strike="noStrike">
@@ -1192,9 +1246,9 @@
         <p:grpSpPr>
           <a:xfrm>
             <a:off x="360000" y="5040000"/>
-            <a:ext cx="9180000" cy="540000"/>
+            <a:ext cx="9179640" cy="539640"/>
             <a:chOff x="360000" y="5040000"/>
-            <a:chExt cx="9180000" cy="540000"/>
+            <a:chExt cx="9179640" cy="539640"/>
           </a:xfrm>
         </p:grpSpPr>
         <p:sp>
@@ -1206,7 +1260,7 @@
           <p:spPr>
             <a:xfrm>
               <a:off x="360000" y="5040000"/>
-              <a:ext cx="1260000" cy="540000"/>
+              <a:ext cx="1259640" cy="539640"/>
             </a:xfrm>
             <a:prstGeom prst="rect">
               <a:avLst/>
@@ -1231,7 +1285,11 @@
               <a:noAutofit/>
             </a:bodyPr>
             <a:p>
-              <a:pPr algn="ctr"/>
+              <a:pPr algn="ctr">
+                <a:lnSpc>
+                  <a:spcPct val="100000"/>
+                </a:lnSpc>
+              </a:pPr>
               <a:r>
                 <a:rPr lang="it-IT" sz="1400" b="0" u="none" strike="noStrike">
                   <a:solidFill>
@@ -1240,6 +1298,7 @@
                   <a:effectLst/>
                   <a:uFillTx/>
                   <a:latin typeface="Segoe UI Semibold"/>
+                  <a:ea typeface="DejaVu Sans"/>
                 </a:rPr>
                 <a:t>Problem</a:t>
               </a:r>
@@ -1249,7 +1308,7 @@
                 </a:solidFill>
                 <a:effectLst/>
                 <a:uFillTx/>
-                <a:latin typeface="Segoe UI Semibold"/>
+                <a:latin typeface="Arial"/>
               </a:endParaRPr>
             </a:p>
           </p:txBody>
@@ -1263,7 +1322,7 @@
           <p:spPr>
             <a:xfrm>
               <a:off x="2340000" y="5040000"/>
-              <a:ext cx="1260000" cy="540000"/>
+              <a:ext cx="1259640" cy="539640"/>
             </a:xfrm>
             <a:prstGeom prst="rect">
               <a:avLst/>
@@ -1288,7 +1347,11 @@
               <a:noAutofit/>
             </a:bodyPr>
             <a:p>
-              <a:pPr algn="ctr"/>
+              <a:pPr algn="ctr">
+                <a:lnSpc>
+                  <a:spcPct val="100000"/>
+                </a:lnSpc>
+              </a:pPr>
               <a:r>
                 <a:rPr lang="it-IT" sz="1400" b="0" u="none" strike="noStrike">
                   <a:solidFill>
@@ -1297,6 +1360,7 @@
                   <a:effectLst/>
                   <a:uFillTx/>
                   <a:latin typeface="Segoe UI Semibold"/>
+                  <a:ea typeface="DejaVu Sans"/>
                 </a:rPr>
                 <a:t>Extract and Clean data</a:t>
               </a:r>
@@ -1306,7 +1370,7 @@
                 </a:solidFill>
                 <a:effectLst/>
                 <a:uFillTx/>
-                <a:latin typeface="Segoe UI Semibold"/>
+                <a:latin typeface="Arial"/>
               </a:endParaRPr>
             </a:p>
           </p:txBody>
@@ -1320,7 +1384,7 @@
           <p:spPr>
             <a:xfrm>
               <a:off x="4320000" y="5040000"/>
-              <a:ext cx="1260000" cy="540000"/>
+              <a:ext cx="1259640" cy="539640"/>
             </a:xfrm>
             <a:prstGeom prst="rect">
               <a:avLst/>
@@ -1345,7 +1409,11 @@
               <a:noAutofit/>
             </a:bodyPr>
             <a:p>
-              <a:pPr algn="ctr"/>
+              <a:pPr algn="ctr">
+                <a:lnSpc>
+                  <a:spcPct val="100000"/>
+                </a:lnSpc>
+              </a:pPr>
               <a:r>
                 <a:rPr lang="it-IT" sz="1400" b="0" u="none" strike="noStrike">
                   <a:solidFill>
@@ -1354,6 +1422,7 @@
                   <a:effectLst/>
                   <a:uFillTx/>
                   <a:latin typeface="Segoe UI Semibold"/>
+                  <a:ea typeface="DejaVu Sans"/>
                 </a:rPr>
                 <a:t>EDA and Clustering</a:t>
               </a:r>
@@ -1363,7 +1432,7 @@
                 </a:solidFill>
                 <a:effectLst/>
                 <a:uFillTx/>
-                <a:latin typeface="Segoe UI Semibold"/>
+                <a:latin typeface="Arial"/>
               </a:endParaRPr>
             </a:p>
           </p:txBody>
@@ -1377,7 +1446,7 @@
           <p:spPr>
             <a:xfrm>
               <a:off x="6300000" y="5040000"/>
-              <a:ext cx="1260000" cy="540000"/>
+              <a:ext cx="1259640" cy="539640"/>
             </a:xfrm>
             <a:prstGeom prst="rect">
               <a:avLst/>
@@ -1402,7 +1471,11 @@
               <a:noAutofit/>
             </a:bodyPr>
             <a:p>
-              <a:pPr algn="ctr"/>
+              <a:pPr algn="ctr">
+                <a:lnSpc>
+                  <a:spcPct val="100000"/>
+                </a:lnSpc>
+              </a:pPr>
               <a:r>
                 <a:rPr lang="it-IT" sz="1400" b="0" u="none" strike="noStrike">
                   <a:solidFill>
@@ -1411,6 +1484,7 @@
                   <a:effectLst/>
                   <a:uFillTx/>
                   <a:latin typeface="Segoe UI Semibold"/>
+                  <a:ea typeface="DejaVu Sans"/>
                 </a:rPr>
                 <a:t>Power Bi  Dashboard</a:t>
               </a:r>
@@ -1420,7 +1494,7 @@
                 </a:solidFill>
                 <a:effectLst/>
                 <a:uFillTx/>
-                <a:latin typeface="Segoe UI Semibold"/>
+                <a:latin typeface="Arial"/>
               </a:endParaRPr>
             </a:p>
           </p:txBody>
@@ -1434,7 +1508,7 @@
           <p:spPr>
             <a:xfrm>
               <a:off x="8280000" y="5040000"/>
-              <a:ext cx="1260000" cy="540000"/>
+              <a:ext cx="1259640" cy="539640"/>
             </a:xfrm>
             <a:prstGeom prst="rect">
               <a:avLst/>
@@ -1459,7 +1533,11 @@
               <a:noAutofit/>
             </a:bodyPr>
             <a:p>
-              <a:pPr algn="ctr"/>
+              <a:pPr algn="ctr">
+                <a:lnSpc>
+                  <a:spcPct val="100000"/>
+                </a:lnSpc>
+              </a:pPr>
               <a:r>
                 <a:rPr lang="it-IT" sz="1400" b="0" u="none" strike="noStrike">
                   <a:solidFill>
@@ -1468,6 +1546,7 @@
                   <a:effectLst/>
                   <a:uFillTx/>
                   <a:latin typeface="Segoe UI Semibold"/>
+                  <a:ea typeface="DejaVu Sans"/>
                 </a:rPr>
                 <a:t>Key Findings</a:t>
               </a:r>
@@ -1477,7 +1556,7 @@
                 </a:solidFill>
                 <a:effectLst/>
                 <a:uFillTx/>
-                <a:latin typeface="Segoe UI Semibold"/>
+                <a:latin typeface="Arial"/>
               </a:endParaRPr>
             </a:p>
           </p:txBody>
@@ -1491,7 +1570,7 @@
           <p:spPr>
             <a:xfrm>
               <a:off x="1728000" y="5220000"/>
-              <a:ext cx="540000" cy="180000"/>
+              <a:ext cx="539640" cy="179640"/>
             </a:xfrm>
             <a:prstGeom prst="rightArrow">
               <a:avLst>
@@ -1539,7 +1618,7 @@
           <p:spPr>
             <a:xfrm>
               <a:off x="3672000" y="5220000"/>
-              <a:ext cx="540000" cy="180000"/>
+              <a:ext cx="539640" cy="179640"/>
             </a:xfrm>
             <a:prstGeom prst="rightArrow">
               <a:avLst>
@@ -1587,7 +1666,7 @@
           <p:spPr>
             <a:xfrm>
               <a:off x="5652000" y="5220000"/>
-              <a:ext cx="540000" cy="180000"/>
+              <a:ext cx="539640" cy="179640"/>
             </a:xfrm>
             <a:prstGeom prst="rightArrow">
               <a:avLst>
@@ -1635,7 +1714,7 @@
           <p:spPr>
             <a:xfrm>
               <a:off x="7632000" y="5220000"/>
-              <a:ext cx="540000" cy="180000"/>
+              <a:ext cx="539640" cy="179640"/>
             </a:xfrm>
             <a:prstGeom prst="rightArrow">
               <a:avLst>
@@ -1717,8 +1796,8 @@
         </p:nvSpPr>
         <p:spPr>
           <a:xfrm>
-            <a:off x="504000" y="225720"/>
-            <a:ext cx="9071640" cy="946440"/>
+            <a:off x="504000" y="225360"/>
+            <a:ext cx="9071280" cy="946800"/>
           </a:xfrm>
           <a:prstGeom prst="rect">
             <a:avLst/>
@@ -1736,7 +1815,13 @@
           </a:bodyPr>
           <a:p>
             <a:pPr indent="0" algn="ctr">
+              <a:lnSpc>
+                <a:spcPct val="100000"/>
+              </a:lnSpc>
               <a:buNone/>
+              <a:tabLst>
+                <a:tab pos="0" algn="l"/>
+              </a:tabLst>
             </a:pPr>
             <a:r>
               <a:rPr lang="it-IT" sz="3200" b="0" u="none" strike="noStrike">
@@ -1751,11 +1836,11 @@
             </a:r>
             <a:endParaRPr lang="it-IT" sz="3200" b="0" u="none" strike="noStrike">
               <a:solidFill>
-                <a:srgbClr val="FFFFFF"/>
+                <a:srgbClr val="000000"/>
               </a:solidFill>
               <a:effectLst/>
               <a:uFillTx/>
-              <a:latin typeface="Segoe UI Semibold"/>
+              <a:latin typeface="Arial"/>
             </a:endParaRPr>
           </a:p>
         </p:txBody>
@@ -1769,9 +1854,9 @@
         <p:grpSpPr>
           <a:xfrm>
             <a:off x="360000" y="5040000"/>
-            <a:ext cx="9180000" cy="540000"/>
+            <a:ext cx="9179640" cy="539640"/>
             <a:chOff x="360000" y="5040000"/>
-            <a:chExt cx="9180000" cy="540000"/>
+            <a:chExt cx="9179640" cy="539640"/>
           </a:xfrm>
         </p:grpSpPr>
         <p:sp>
@@ -1783,7 +1868,7 @@
           <p:spPr>
             <a:xfrm>
               <a:off x="360000" y="5040000"/>
-              <a:ext cx="1260000" cy="540000"/>
+              <a:ext cx="1259640" cy="539640"/>
             </a:xfrm>
             <a:prstGeom prst="rect">
               <a:avLst/>
@@ -1808,7 +1893,11 @@
               <a:noAutofit/>
             </a:bodyPr>
             <a:p>
-              <a:pPr algn="ctr"/>
+              <a:pPr algn="ctr">
+                <a:lnSpc>
+                  <a:spcPct val="100000"/>
+                </a:lnSpc>
+              </a:pPr>
               <a:r>
                 <a:rPr lang="it-IT" sz="1400" b="0" u="none" strike="noStrike">
                   <a:solidFill>
@@ -1817,6 +1906,7 @@
                   <a:effectLst/>
                   <a:uFillTx/>
                   <a:latin typeface="Segoe UI Semibold"/>
+                  <a:ea typeface="DejaVu Sans"/>
                 </a:rPr>
                 <a:t>Problem</a:t>
               </a:r>
@@ -1826,7 +1916,7 @@
                 </a:solidFill>
                 <a:effectLst/>
                 <a:uFillTx/>
-                <a:latin typeface="Segoe UI Semibold"/>
+                <a:latin typeface="Arial"/>
               </a:endParaRPr>
             </a:p>
           </p:txBody>
@@ -1840,7 +1930,7 @@
           <p:spPr>
             <a:xfrm>
               <a:off x="2340000" y="5040000"/>
-              <a:ext cx="1260000" cy="540000"/>
+              <a:ext cx="1259640" cy="539640"/>
             </a:xfrm>
             <a:prstGeom prst="rect">
               <a:avLst/>
@@ -1865,7 +1955,11 @@
               <a:noAutofit/>
             </a:bodyPr>
             <a:p>
-              <a:pPr algn="ctr"/>
+              <a:pPr algn="ctr">
+                <a:lnSpc>
+                  <a:spcPct val="100000"/>
+                </a:lnSpc>
+              </a:pPr>
               <a:r>
                 <a:rPr lang="it-IT" sz="1400" b="0" u="none" strike="noStrike">
                   <a:solidFill>
@@ -1874,6 +1968,7 @@
                   <a:effectLst/>
                   <a:uFillTx/>
                   <a:latin typeface="Segoe UI Semibold"/>
+                  <a:ea typeface="DejaVu Sans"/>
                 </a:rPr>
                 <a:t>Extract and Clean data</a:t>
               </a:r>
@@ -1883,7 +1978,7 @@
                 </a:solidFill>
                 <a:effectLst/>
                 <a:uFillTx/>
-                <a:latin typeface="Segoe UI Semibold"/>
+                <a:latin typeface="Arial"/>
               </a:endParaRPr>
             </a:p>
           </p:txBody>
@@ -1897,7 +1992,7 @@
           <p:spPr>
             <a:xfrm>
               <a:off x="4320000" y="5040000"/>
-              <a:ext cx="1260000" cy="540000"/>
+              <a:ext cx="1259640" cy="539640"/>
             </a:xfrm>
             <a:prstGeom prst="rect">
               <a:avLst/>
@@ -1922,7 +2017,11 @@
               <a:noAutofit/>
             </a:bodyPr>
             <a:p>
-              <a:pPr algn="ctr"/>
+              <a:pPr algn="ctr">
+                <a:lnSpc>
+                  <a:spcPct val="100000"/>
+                </a:lnSpc>
+              </a:pPr>
               <a:r>
                 <a:rPr lang="it-IT" sz="1400" b="0" u="none" strike="noStrike">
                   <a:solidFill>
@@ -1931,6 +2030,7 @@
                   <a:effectLst/>
                   <a:uFillTx/>
                   <a:latin typeface="Segoe UI Semibold"/>
+                  <a:ea typeface="DejaVu Sans"/>
                 </a:rPr>
                 <a:t>EDA and Clustering</a:t>
               </a:r>
@@ -1940,7 +2040,7 @@
                 </a:solidFill>
                 <a:effectLst/>
                 <a:uFillTx/>
-                <a:latin typeface="Segoe UI Semibold"/>
+                <a:latin typeface="Arial"/>
               </a:endParaRPr>
             </a:p>
           </p:txBody>
@@ -1954,7 +2054,7 @@
           <p:spPr>
             <a:xfrm>
               <a:off x="6300000" y="5040000"/>
-              <a:ext cx="1260000" cy="540000"/>
+              <a:ext cx="1259640" cy="539640"/>
             </a:xfrm>
             <a:prstGeom prst="rect">
               <a:avLst/>
@@ -1979,7 +2079,11 @@
               <a:noAutofit/>
             </a:bodyPr>
             <a:p>
-              <a:pPr algn="ctr"/>
+              <a:pPr algn="ctr">
+                <a:lnSpc>
+                  <a:spcPct val="100000"/>
+                </a:lnSpc>
+              </a:pPr>
               <a:r>
                 <a:rPr lang="it-IT" sz="1400" b="0" u="none" strike="noStrike">
                   <a:solidFill>
@@ -1988,6 +2092,7 @@
                   <a:effectLst/>
                   <a:uFillTx/>
                   <a:latin typeface="Segoe UI Semibold"/>
+                  <a:ea typeface="DejaVu Sans"/>
                 </a:rPr>
                 <a:t>Power Bi  Dashboard</a:t>
               </a:r>
@@ -1997,7 +2102,7 @@
                 </a:solidFill>
                 <a:effectLst/>
                 <a:uFillTx/>
-                <a:latin typeface="Segoe UI Semibold"/>
+                <a:latin typeface="Arial"/>
               </a:endParaRPr>
             </a:p>
           </p:txBody>
@@ -2011,7 +2116,7 @@
           <p:spPr>
             <a:xfrm>
               <a:off x="8280000" y="5040000"/>
-              <a:ext cx="1260000" cy="540000"/>
+              <a:ext cx="1259640" cy="539640"/>
             </a:xfrm>
             <a:prstGeom prst="rect">
               <a:avLst/>
@@ -2036,7 +2141,11 @@
               <a:noAutofit/>
             </a:bodyPr>
             <a:p>
-              <a:pPr algn="ctr"/>
+              <a:pPr algn="ctr">
+                <a:lnSpc>
+                  <a:spcPct val="100000"/>
+                </a:lnSpc>
+              </a:pPr>
               <a:r>
                 <a:rPr lang="it-IT" sz="1400" b="0" u="none" strike="noStrike">
                   <a:solidFill>
@@ -2045,6 +2154,7 @@
                   <a:effectLst/>
                   <a:uFillTx/>
                   <a:latin typeface="Segoe UI Semibold"/>
+                  <a:ea typeface="DejaVu Sans"/>
                 </a:rPr>
                 <a:t>Key Findings</a:t>
               </a:r>
@@ -2054,7 +2164,7 @@
                 </a:solidFill>
                 <a:effectLst/>
                 <a:uFillTx/>
-                <a:latin typeface="Segoe UI Semibold"/>
+                <a:latin typeface="Arial"/>
               </a:endParaRPr>
             </a:p>
           </p:txBody>
@@ -2068,7 +2178,7 @@
           <p:spPr>
             <a:xfrm>
               <a:off x="1728000" y="5220000"/>
-              <a:ext cx="540000" cy="180000"/>
+              <a:ext cx="539640" cy="179640"/>
             </a:xfrm>
             <a:prstGeom prst="rightArrow">
               <a:avLst>
@@ -2116,7 +2226,7 @@
           <p:spPr>
             <a:xfrm>
               <a:off x="3672000" y="5220000"/>
-              <a:ext cx="540000" cy="180000"/>
+              <a:ext cx="539640" cy="179640"/>
             </a:xfrm>
             <a:prstGeom prst="rightArrow">
               <a:avLst>
@@ -2164,7 +2274,7 @@
           <p:spPr>
             <a:xfrm>
               <a:off x="5652000" y="5220000"/>
-              <a:ext cx="540000" cy="180000"/>
+              <a:ext cx="539640" cy="179640"/>
             </a:xfrm>
             <a:prstGeom prst="rightArrow">
               <a:avLst>
@@ -2212,7 +2322,7 @@
           <p:spPr>
             <a:xfrm>
               <a:off x="7632000" y="5220000"/>
-              <a:ext cx="540000" cy="180000"/>
+              <a:ext cx="539640" cy="179640"/>
             </a:xfrm>
             <a:prstGeom prst="rightArrow">
               <a:avLst>
@@ -2255,13 +2365,13 @@
       <p:sp>
         <p:nvSpPr>
           <p:cNvPr id="32" name=""/>
-          <p:cNvSpPr txBox="1"/>
+          <p:cNvSpPr/>
           <p:nvPr/>
         </p:nvSpPr>
         <p:spPr>
           <a:xfrm>
             <a:off x="720000" y="1282680"/>
-            <a:ext cx="8460000" cy="3432600"/>
+            <a:ext cx="8459640" cy="3432240"/>
           </a:xfrm>
           <a:prstGeom prst="rect">
             <a:avLst/>
@@ -2271,12 +2381,21 @@
             <a:noFill/>
           </a:ln>
         </p:spPr>
+        <p:style>
+          <a:lnRef idx="0"/>
+          <a:fillRef idx="0"/>
+          <a:effectRef idx="0"/>
+          <a:fontRef idx="minor"/>
+        </p:style>
         <p:txBody>
           <a:bodyPr lIns="90000" tIns="45000" rIns="90000" bIns="45000" anchor="t">
             <a:spAutoFit/>
           </a:bodyPr>
           <a:p>
             <a:pPr marL="216000" indent="-216000">
+              <a:lnSpc>
+                <a:spcPct val="100000"/>
+              </a:lnSpc>
               <a:spcBef>
                 <a:spcPts val="1191"/>
               </a:spcBef>
@@ -2345,6 +2464,9 @@
           </a:p>
           <a:p>
             <a:pPr marL="216000" indent="-216000">
+              <a:lnSpc>
+                <a:spcPct val="100000"/>
+              </a:lnSpc>
               <a:spcBef>
                 <a:spcPts val="1191"/>
               </a:spcBef>
@@ -2413,6 +2535,9 @@
           </a:p>
           <a:p>
             <a:pPr marL="216000" indent="-216000">
+              <a:lnSpc>
+                <a:spcPct val="100000"/>
+              </a:lnSpc>
               <a:spcBef>
                 <a:spcPts val="1191"/>
               </a:spcBef>
@@ -2459,6 +2584,9 @@
           </a:p>
           <a:p>
             <a:pPr marL="432000" lvl="1" indent="-216000">
+              <a:lnSpc>
+                <a:spcPct val="100000"/>
+              </a:lnSpc>
               <a:spcBef>
                 <a:spcPts val="1191"/>
               </a:spcBef>
@@ -2494,6 +2622,9 @@
           </a:p>
           <a:p>
             <a:pPr marL="432000" lvl="1" indent="-216000">
+              <a:lnSpc>
+                <a:spcPct val="100000"/>
+              </a:lnSpc>
               <a:spcBef>
                 <a:spcPts val="1191"/>
               </a:spcBef>
@@ -2529,6 +2660,9 @@
           </a:p>
           <a:p>
             <a:pPr marL="432000" lvl="1" indent="-216000">
+              <a:lnSpc>
+                <a:spcPct val="100000"/>
+              </a:lnSpc>
               <a:spcBef>
                 <a:spcPts val="1191"/>
               </a:spcBef>
@@ -2564,6 +2698,9 @@
           </a:p>
           <a:p>
             <a:pPr marL="216000" indent="-216000">
+              <a:lnSpc>
+                <a:spcPct val="100000"/>
+              </a:lnSpc>
               <a:spcBef>
                 <a:spcPts val="1191"/>
               </a:spcBef>
@@ -2620,6 +2757,11 @@
             </a:endParaRPr>
           </a:p>
           <a:p>
+            <a:pPr>
+              <a:lnSpc>
+                <a:spcPct val="100000"/>
+              </a:lnSpc>
+            </a:pPr>
             <a:endParaRPr lang="it-IT" sz="1000" b="0" u="none" strike="noStrike">
               <a:solidFill>
                 <a:srgbClr val="000000"/>
@@ -2634,13 +2776,13 @@
       <p:sp>
         <p:nvSpPr>
           <p:cNvPr id="33" name=""/>
-          <p:cNvSpPr txBox="1"/>
+          <p:cNvSpPr/>
           <p:nvPr/>
         </p:nvSpPr>
         <p:spPr>
           <a:xfrm>
-            <a:off x="7740000" y="4392000"/>
-            <a:ext cx="2340000" cy="495720"/>
+            <a:off x="7740000" y="3780000"/>
+            <a:ext cx="2339640" cy="495360"/>
           </a:xfrm>
           <a:prstGeom prst="rect">
             <a:avLst/>
@@ -2650,11 +2792,22 @@
             <a:noFill/>
           </a:ln>
         </p:spPr>
+        <p:style>
+          <a:lnRef idx="0"/>
+          <a:fillRef idx="0"/>
+          <a:effectRef idx="0"/>
+          <a:fontRef idx="minor"/>
+        </p:style>
         <p:txBody>
           <a:bodyPr lIns="90000" tIns="45000" rIns="90000" bIns="45000" anchor="t">
             <a:spAutoFit/>
           </a:bodyPr>
           <a:p>
+            <a:pPr>
+              <a:lnSpc>
+                <a:spcPct val="100000"/>
+              </a:lnSpc>
+            </a:pPr>
             <a:r>
               <a:rPr lang="it-IT" sz="1300" b="0" u="none" strike="noStrike">
                 <a:solidFill>
@@ -2741,8 +2894,8 @@
         </p:nvSpPr>
         <p:spPr>
           <a:xfrm>
-            <a:off x="504000" y="225720"/>
-            <a:ext cx="9071640" cy="946440"/>
+            <a:off x="504000" y="225360"/>
+            <a:ext cx="9071280" cy="946800"/>
           </a:xfrm>
           <a:prstGeom prst="rect">
             <a:avLst/>
@@ -2760,7 +2913,13 @@
           </a:bodyPr>
           <a:p>
             <a:pPr indent="0" algn="ctr">
+              <a:lnSpc>
+                <a:spcPct val="100000"/>
+              </a:lnSpc>
               <a:buNone/>
+              <a:tabLst>
+                <a:tab pos="0" algn="l"/>
+              </a:tabLst>
             </a:pPr>
             <a:r>
               <a:rPr lang="it-IT" sz="3200" b="0" u="none" strike="noStrike">
@@ -2775,11 +2934,11 @@
             </a:r>
             <a:endParaRPr lang="it-IT" sz="3200" b="0" u="none" strike="noStrike">
               <a:solidFill>
-                <a:srgbClr val="FFFFFF"/>
+                <a:srgbClr val="000000"/>
               </a:solidFill>
               <a:effectLst/>
               <a:uFillTx/>
-              <a:latin typeface="Segoe UI Semibold"/>
+              <a:latin typeface="Arial"/>
             </a:endParaRPr>
           </a:p>
         </p:txBody>
@@ -2793,9 +2952,9 @@
         <p:grpSpPr>
           <a:xfrm>
             <a:off x="360000" y="5040000"/>
-            <a:ext cx="9180000" cy="540000"/>
+            <a:ext cx="9179640" cy="539640"/>
             <a:chOff x="360000" y="5040000"/>
-            <a:chExt cx="9180000" cy="540000"/>
+            <a:chExt cx="9179640" cy="539640"/>
           </a:xfrm>
         </p:grpSpPr>
         <p:sp>
@@ -2807,7 +2966,7 @@
           <p:spPr>
             <a:xfrm>
               <a:off x="360000" y="5040000"/>
-              <a:ext cx="1260000" cy="540000"/>
+              <a:ext cx="1259640" cy="539640"/>
             </a:xfrm>
             <a:prstGeom prst="rect">
               <a:avLst/>
@@ -2832,7 +2991,11 @@
               <a:noAutofit/>
             </a:bodyPr>
             <a:p>
-              <a:pPr algn="ctr"/>
+              <a:pPr algn="ctr">
+                <a:lnSpc>
+                  <a:spcPct val="100000"/>
+                </a:lnSpc>
+              </a:pPr>
               <a:r>
                 <a:rPr lang="it-IT" sz="1400" b="0" u="none" strike="noStrike">
                   <a:solidFill>
@@ -2841,6 +3004,7 @@
                   <a:effectLst/>
                   <a:uFillTx/>
                   <a:latin typeface="Segoe UI Semibold"/>
+                  <a:ea typeface="DejaVu Sans"/>
                 </a:rPr>
                 <a:t>Problem</a:t>
               </a:r>
@@ -2850,7 +3014,7 @@
                 </a:solidFill>
                 <a:effectLst/>
                 <a:uFillTx/>
-                <a:latin typeface="Segoe UI Semibold"/>
+                <a:latin typeface="Arial"/>
               </a:endParaRPr>
             </a:p>
           </p:txBody>
@@ -2864,7 +3028,7 @@
           <p:spPr>
             <a:xfrm>
               <a:off x="2340000" y="5040000"/>
-              <a:ext cx="1260000" cy="540000"/>
+              <a:ext cx="1259640" cy="539640"/>
             </a:xfrm>
             <a:prstGeom prst="rect">
               <a:avLst/>
@@ -2889,7 +3053,11 @@
               <a:noAutofit/>
             </a:bodyPr>
             <a:p>
-              <a:pPr algn="ctr"/>
+              <a:pPr algn="ctr">
+                <a:lnSpc>
+                  <a:spcPct val="100000"/>
+                </a:lnSpc>
+              </a:pPr>
               <a:r>
                 <a:rPr lang="it-IT" sz="1400" b="0" u="none" strike="noStrike">
                   <a:solidFill>
@@ -2898,6 +3066,7 @@
                   <a:effectLst/>
                   <a:uFillTx/>
                   <a:latin typeface="Segoe UI Semibold"/>
+                  <a:ea typeface="DejaVu Sans"/>
                 </a:rPr>
                 <a:t>Extract and Clean data</a:t>
               </a:r>
@@ -2907,7 +3076,7 @@
                 </a:solidFill>
                 <a:effectLst/>
                 <a:uFillTx/>
-                <a:latin typeface="Segoe UI Semibold"/>
+                <a:latin typeface="Arial"/>
               </a:endParaRPr>
             </a:p>
           </p:txBody>
@@ -2921,7 +3090,7 @@
           <p:spPr>
             <a:xfrm>
               <a:off x="4320000" y="5040000"/>
-              <a:ext cx="1260000" cy="540000"/>
+              <a:ext cx="1259640" cy="539640"/>
             </a:xfrm>
             <a:prstGeom prst="rect">
               <a:avLst/>
@@ -2946,7 +3115,11 @@
               <a:noAutofit/>
             </a:bodyPr>
             <a:p>
-              <a:pPr algn="ctr"/>
+              <a:pPr algn="ctr">
+                <a:lnSpc>
+                  <a:spcPct val="100000"/>
+                </a:lnSpc>
+              </a:pPr>
               <a:r>
                 <a:rPr lang="it-IT" sz="1400" b="0" u="none" strike="noStrike">
                   <a:solidFill>
@@ -2955,6 +3128,7 @@
                   <a:effectLst/>
                   <a:uFillTx/>
                   <a:latin typeface="Segoe UI Semibold"/>
+                  <a:ea typeface="DejaVu Sans"/>
                 </a:rPr>
                 <a:t>EDA and Clustering</a:t>
               </a:r>
@@ -2964,7 +3138,7 @@
                 </a:solidFill>
                 <a:effectLst/>
                 <a:uFillTx/>
-                <a:latin typeface="Segoe UI Semibold"/>
+                <a:latin typeface="Arial"/>
               </a:endParaRPr>
             </a:p>
           </p:txBody>
@@ -2978,7 +3152,7 @@
           <p:spPr>
             <a:xfrm>
               <a:off x="6300000" y="5040000"/>
-              <a:ext cx="1260000" cy="540000"/>
+              <a:ext cx="1259640" cy="539640"/>
             </a:xfrm>
             <a:prstGeom prst="rect">
               <a:avLst/>
@@ -3003,7 +3177,11 @@
               <a:noAutofit/>
             </a:bodyPr>
             <a:p>
-              <a:pPr algn="ctr"/>
+              <a:pPr algn="ctr">
+                <a:lnSpc>
+                  <a:spcPct val="100000"/>
+                </a:lnSpc>
+              </a:pPr>
               <a:r>
                 <a:rPr lang="it-IT" sz="1400" b="0" u="none" strike="noStrike">
                   <a:solidFill>
@@ -3012,6 +3190,7 @@
                   <a:effectLst/>
                   <a:uFillTx/>
                   <a:latin typeface="Segoe UI Semibold"/>
+                  <a:ea typeface="DejaVu Sans"/>
                 </a:rPr>
                 <a:t>Power Bi  Dashboard</a:t>
               </a:r>
@@ -3021,7 +3200,7 @@
                 </a:solidFill>
                 <a:effectLst/>
                 <a:uFillTx/>
-                <a:latin typeface="Segoe UI Semibold"/>
+                <a:latin typeface="Arial"/>
               </a:endParaRPr>
             </a:p>
           </p:txBody>
@@ -3035,7 +3214,7 @@
           <p:spPr>
             <a:xfrm>
               <a:off x="8280000" y="5040000"/>
-              <a:ext cx="1260000" cy="540000"/>
+              <a:ext cx="1259640" cy="539640"/>
             </a:xfrm>
             <a:prstGeom prst="rect">
               <a:avLst/>
@@ -3060,7 +3239,11 @@
               <a:noAutofit/>
             </a:bodyPr>
             <a:p>
-              <a:pPr algn="ctr"/>
+              <a:pPr algn="ctr">
+                <a:lnSpc>
+                  <a:spcPct val="100000"/>
+                </a:lnSpc>
+              </a:pPr>
               <a:r>
                 <a:rPr lang="it-IT" sz="1400" b="0" u="none" strike="noStrike">
                   <a:solidFill>
@@ -3069,6 +3252,7 @@
                   <a:effectLst/>
                   <a:uFillTx/>
                   <a:latin typeface="Segoe UI Semibold"/>
+                  <a:ea typeface="DejaVu Sans"/>
                 </a:rPr>
                 <a:t>Key Findings</a:t>
               </a:r>
@@ -3078,7 +3262,7 @@
                 </a:solidFill>
                 <a:effectLst/>
                 <a:uFillTx/>
-                <a:latin typeface="Segoe UI Semibold"/>
+                <a:latin typeface="Arial"/>
               </a:endParaRPr>
             </a:p>
           </p:txBody>
@@ -3092,7 +3276,7 @@
           <p:spPr>
             <a:xfrm>
               <a:off x="1728000" y="5220000"/>
-              <a:ext cx="540000" cy="180000"/>
+              <a:ext cx="539640" cy="179640"/>
             </a:xfrm>
             <a:prstGeom prst="rightArrow">
               <a:avLst>
@@ -3140,7 +3324,7 @@
           <p:spPr>
             <a:xfrm>
               <a:off x="3672000" y="5220000"/>
-              <a:ext cx="540000" cy="180000"/>
+              <a:ext cx="539640" cy="179640"/>
             </a:xfrm>
             <a:prstGeom prst="rightArrow">
               <a:avLst>
@@ -3188,7 +3372,7 @@
           <p:spPr>
             <a:xfrm>
               <a:off x="5652000" y="5220000"/>
-              <a:ext cx="540000" cy="180000"/>
+              <a:ext cx="539640" cy="179640"/>
             </a:xfrm>
             <a:prstGeom prst="rightArrow">
               <a:avLst>
@@ -3236,7 +3420,7 @@
           <p:spPr>
             <a:xfrm>
               <a:off x="7632000" y="5220000"/>
-              <a:ext cx="540000" cy="180000"/>
+              <a:ext cx="539640" cy="179640"/>
             </a:xfrm>
             <a:prstGeom prst="rightArrow">
               <a:avLst>
@@ -3279,13 +3463,13 @@
       <p:sp>
         <p:nvSpPr>
           <p:cNvPr id="45" name=""/>
-          <p:cNvSpPr txBox="1"/>
+          <p:cNvSpPr/>
           <p:nvPr/>
         </p:nvSpPr>
         <p:spPr>
           <a:xfrm>
-            <a:off x="7740000" y="4436280"/>
-            <a:ext cx="2340000" cy="495720"/>
+            <a:off x="7560000" y="1304640"/>
+            <a:ext cx="2339640" cy="495360"/>
           </a:xfrm>
           <a:prstGeom prst="rect">
             <a:avLst/>
@@ -3295,11 +3479,22 @@
             <a:noFill/>
           </a:ln>
         </p:spPr>
+        <p:style>
+          <a:lnRef idx="0"/>
+          <a:fillRef idx="0"/>
+          <a:effectRef idx="0"/>
+          <a:fontRef idx="minor"/>
+        </p:style>
         <p:txBody>
           <a:bodyPr lIns="90000" tIns="45000" rIns="90000" bIns="45000" anchor="t">
             <a:spAutoFit/>
           </a:bodyPr>
           <a:p>
+            <a:pPr>
+              <a:lnSpc>
+                <a:spcPct val="100000"/>
+              </a:lnSpc>
+            </a:pPr>
             <a:r>
               <a:rPr lang="it-IT" sz="1300" b="0" u="none" strike="noStrike">
                 <a:solidFill>
@@ -3347,13 +3542,13 @@
       <p:sp>
         <p:nvSpPr>
           <p:cNvPr id="46" name=""/>
-          <p:cNvSpPr txBox="1"/>
+          <p:cNvSpPr/>
           <p:nvPr/>
         </p:nvSpPr>
         <p:spPr>
           <a:xfrm>
             <a:off x="540000" y="1332000"/>
-            <a:ext cx="8640000" cy="3303360"/>
+            <a:ext cx="8639640" cy="3303000"/>
           </a:xfrm>
           <a:prstGeom prst="rect">
             <a:avLst/>
@@ -3363,12 +3558,21 @@
             <a:noFill/>
           </a:ln>
         </p:spPr>
+        <p:style>
+          <a:lnRef idx="0"/>
+          <a:fillRef idx="0"/>
+          <a:effectRef idx="0"/>
+          <a:fontRef idx="minor"/>
+        </p:style>
         <p:txBody>
           <a:bodyPr lIns="90000" tIns="45000" rIns="90000" bIns="45000" anchor="t">
             <a:spAutoFit/>
           </a:bodyPr>
           <a:p>
             <a:pPr marL="216000" indent="-216000">
+              <a:lnSpc>
+                <a:spcPct val="100000"/>
+              </a:lnSpc>
               <a:spcBef>
                 <a:spcPts val="1191"/>
               </a:spcBef>
@@ -3415,6 +3619,9 @@
           </a:p>
           <a:p>
             <a:pPr marL="432000" lvl="1" indent="-216000">
+              <a:lnSpc>
+                <a:spcPct val="100000"/>
+              </a:lnSpc>
               <a:spcBef>
                 <a:spcPts val="1191"/>
               </a:spcBef>
@@ -3450,6 +3657,9 @@
           </a:p>
           <a:p>
             <a:pPr marL="432000" lvl="1" indent="-216000">
+              <a:lnSpc>
+                <a:spcPct val="100000"/>
+              </a:lnSpc>
               <a:spcBef>
                 <a:spcPts val="1191"/>
               </a:spcBef>
@@ -3485,6 +3695,9 @@
           </a:p>
           <a:p>
             <a:pPr marL="216000" indent="-216000">
+              <a:lnSpc>
+                <a:spcPct val="100000"/>
+              </a:lnSpc>
               <a:spcBef>
                 <a:spcPts val="1191"/>
               </a:spcBef>
@@ -3531,6 +3744,9 @@
           </a:p>
           <a:p>
             <a:pPr marL="432000" lvl="1" indent="-216000">
+              <a:lnSpc>
+                <a:spcPct val="100000"/>
+              </a:lnSpc>
               <a:spcBef>
                 <a:spcPts val="1191"/>
               </a:spcBef>
@@ -3577,6 +3793,9 @@
           </a:p>
           <a:p>
             <a:pPr marL="432000" lvl="1" indent="-216000">
+              <a:lnSpc>
+                <a:spcPct val="100000"/>
+              </a:lnSpc>
               <a:spcBef>
                 <a:spcPts val="1191"/>
               </a:spcBef>
@@ -3623,6 +3842,9 @@
           </a:p>
           <a:p>
             <a:pPr marL="216000" indent="-216000">
+              <a:lnSpc>
+                <a:spcPct val="100000"/>
+              </a:lnSpc>
               <a:spcBef>
                 <a:spcPts val="1191"/>
               </a:spcBef>
@@ -3690,6 +3912,11 @@
             </a:endParaRPr>
           </a:p>
           <a:p>
+            <a:pPr>
+              <a:lnSpc>
+                <a:spcPct val="100000"/>
+              </a:lnSpc>
+            </a:pPr>
             <a:endParaRPr lang="it-IT" sz="1000" b="0" u="none" strike="noStrike">
               <a:solidFill>
                 <a:srgbClr val="000000"/>
@@ -3743,8 +3970,8 @@
         </p:nvSpPr>
         <p:spPr>
           <a:xfrm>
-            <a:off x="504000" y="225720"/>
-            <a:ext cx="9071640" cy="946440"/>
+            <a:off x="504000" y="225360"/>
+            <a:ext cx="9071280" cy="946800"/>
           </a:xfrm>
           <a:prstGeom prst="rect">
             <a:avLst/>
@@ -3762,7 +3989,13 @@
           </a:bodyPr>
           <a:p>
             <a:pPr indent="0" algn="ctr">
+              <a:lnSpc>
+                <a:spcPct val="100000"/>
+              </a:lnSpc>
               <a:buNone/>
+              <a:tabLst>
+                <a:tab pos="0" algn="l"/>
+              </a:tabLst>
             </a:pPr>
             <a:r>
               <a:rPr lang="it-IT" sz="3200" b="0" u="none" strike="noStrike">
@@ -3777,11 +4010,11 @@
             </a:r>
             <a:endParaRPr lang="it-IT" sz="3200" b="0" u="none" strike="noStrike">
               <a:solidFill>
-                <a:srgbClr val="FFFFFF"/>
+                <a:srgbClr val="000000"/>
               </a:solidFill>
               <a:effectLst/>
               <a:uFillTx/>
-              <a:latin typeface="Segoe UI Semibold"/>
+              <a:latin typeface="Arial"/>
             </a:endParaRPr>
           </a:p>
         </p:txBody>
@@ -3795,9 +4028,9 @@
         <p:grpSpPr>
           <a:xfrm>
             <a:off x="360000" y="5040000"/>
-            <a:ext cx="9180000" cy="540000"/>
+            <a:ext cx="9179640" cy="539640"/>
             <a:chOff x="360000" y="5040000"/>
-            <a:chExt cx="9180000" cy="540000"/>
+            <a:chExt cx="9179640" cy="539640"/>
           </a:xfrm>
         </p:grpSpPr>
         <p:sp>
@@ -3809,7 +4042,7 @@
           <p:spPr>
             <a:xfrm>
               <a:off x="360000" y="5040000"/>
-              <a:ext cx="1260000" cy="540000"/>
+              <a:ext cx="1259640" cy="539640"/>
             </a:xfrm>
             <a:prstGeom prst="rect">
               <a:avLst/>
@@ -3834,7 +4067,11 @@
               <a:noAutofit/>
             </a:bodyPr>
             <a:p>
-              <a:pPr algn="ctr"/>
+              <a:pPr algn="ctr">
+                <a:lnSpc>
+                  <a:spcPct val="100000"/>
+                </a:lnSpc>
+              </a:pPr>
               <a:r>
                 <a:rPr lang="it-IT" sz="1400" b="0" u="none" strike="noStrike">
                   <a:solidFill>
@@ -3843,6 +4080,7 @@
                   <a:effectLst/>
                   <a:uFillTx/>
                   <a:latin typeface="Segoe UI Semibold"/>
+                  <a:ea typeface="DejaVu Sans"/>
                 </a:rPr>
                 <a:t>Problem</a:t>
               </a:r>
@@ -3852,7 +4090,7 @@
                 </a:solidFill>
                 <a:effectLst/>
                 <a:uFillTx/>
-                <a:latin typeface="Segoe UI Semibold"/>
+                <a:latin typeface="Arial"/>
               </a:endParaRPr>
             </a:p>
           </p:txBody>
@@ -3866,7 +4104,7 @@
           <p:spPr>
             <a:xfrm>
               <a:off x="2340000" y="5040000"/>
-              <a:ext cx="1260000" cy="540000"/>
+              <a:ext cx="1259640" cy="539640"/>
             </a:xfrm>
             <a:prstGeom prst="rect">
               <a:avLst/>
@@ -3891,7 +4129,11 @@
               <a:noAutofit/>
             </a:bodyPr>
             <a:p>
-              <a:pPr algn="ctr"/>
+              <a:pPr algn="ctr">
+                <a:lnSpc>
+                  <a:spcPct val="100000"/>
+                </a:lnSpc>
+              </a:pPr>
               <a:r>
                 <a:rPr lang="it-IT" sz="1400" b="0" u="none" strike="noStrike">
                   <a:solidFill>
@@ -3900,6 +4142,7 @@
                   <a:effectLst/>
                   <a:uFillTx/>
                   <a:latin typeface="Segoe UI Semibold"/>
+                  <a:ea typeface="DejaVu Sans"/>
                 </a:rPr>
                 <a:t>Extract and Clean data</a:t>
               </a:r>
@@ -3909,7 +4152,7 @@
                 </a:solidFill>
                 <a:effectLst/>
                 <a:uFillTx/>
-                <a:latin typeface="Segoe UI Semibold"/>
+                <a:latin typeface="Arial"/>
               </a:endParaRPr>
             </a:p>
           </p:txBody>
@@ -3923,7 +4166,7 @@
           <p:spPr>
             <a:xfrm>
               <a:off x="4320000" y="5040000"/>
-              <a:ext cx="1260000" cy="540000"/>
+              <a:ext cx="1259640" cy="539640"/>
             </a:xfrm>
             <a:prstGeom prst="rect">
               <a:avLst/>
@@ -3948,7 +4191,11 @@
               <a:noAutofit/>
             </a:bodyPr>
             <a:p>
-              <a:pPr algn="ctr"/>
+              <a:pPr algn="ctr">
+                <a:lnSpc>
+                  <a:spcPct val="100000"/>
+                </a:lnSpc>
+              </a:pPr>
               <a:r>
                 <a:rPr lang="it-IT" sz="1400" b="0" u="none" strike="noStrike">
                   <a:solidFill>
@@ -3957,6 +4204,7 @@
                   <a:effectLst/>
                   <a:uFillTx/>
                   <a:latin typeface="Segoe UI Semibold"/>
+                  <a:ea typeface="DejaVu Sans"/>
                 </a:rPr>
                 <a:t>EDA and Clustering</a:t>
               </a:r>
@@ -3966,7 +4214,7 @@
                 </a:solidFill>
                 <a:effectLst/>
                 <a:uFillTx/>
-                <a:latin typeface="Segoe UI Semibold"/>
+                <a:latin typeface="Arial"/>
               </a:endParaRPr>
             </a:p>
           </p:txBody>
@@ -3980,7 +4228,7 @@
           <p:spPr>
             <a:xfrm>
               <a:off x="6300000" y="5040000"/>
-              <a:ext cx="1260000" cy="540000"/>
+              <a:ext cx="1259640" cy="539640"/>
             </a:xfrm>
             <a:prstGeom prst="rect">
               <a:avLst/>
@@ -4005,7 +4253,11 @@
               <a:noAutofit/>
             </a:bodyPr>
             <a:p>
-              <a:pPr algn="ctr"/>
+              <a:pPr algn="ctr">
+                <a:lnSpc>
+                  <a:spcPct val="100000"/>
+                </a:lnSpc>
+              </a:pPr>
               <a:r>
                 <a:rPr lang="it-IT" sz="1400" b="0" u="none" strike="noStrike">
                   <a:solidFill>
@@ -4014,6 +4266,7 @@
                   <a:effectLst/>
                   <a:uFillTx/>
                   <a:latin typeface="Segoe UI Semibold"/>
+                  <a:ea typeface="DejaVu Sans"/>
                 </a:rPr>
                 <a:t>Power Bi  Dashboard</a:t>
               </a:r>
@@ -4023,7 +4276,7 @@
                 </a:solidFill>
                 <a:effectLst/>
                 <a:uFillTx/>
-                <a:latin typeface="Segoe UI Semibold"/>
+                <a:latin typeface="Arial"/>
               </a:endParaRPr>
             </a:p>
           </p:txBody>
@@ -4037,7 +4290,7 @@
           <p:spPr>
             <a:xfrm>
               <a:off x="8280000" y="5040000"/>
-              <a:ext cx="1260000" cy="540000"/>
+              <a:ext cx="1259640" cy="539640"/>
             </a:xfrm>
             <a:prstGeom prst="rect">
               <a:avLst/>
@@ -4062,7 +4315,11 @@
               <a:noAutofit/>
             </a:bodyPr>
             <a:p>
-              <a:pPr algn="ctr"/>
+              <a:pPr algn="ctr">
+                <a:lnSpc>
+                  <a:spcPct val="100000"/>
+                </a:lnSpc>
+              </a:pPr>
               <a:r>
                 <a:rPr lang="it-IT" sz="1400" b="0" u="none" strike="noStrike">
                   <a:solidFill>
@@ -4071,6 +4328,7 @@
                   <a:effectLst/>
                   <a:uFillTx/>
                   <a:latin typeface="Segoe UI Semibold"/>
+                  <a:ea typeface="DejaVu Sans"/>
                 </a:rPr>
                 <a:t>Key Findings</a:t>
               </a:r>
@@ -4080,7 +4338,7 @@
                 </a:solidFill>
                 <a:effectLst/>
                 <a:uFillTx/>
-                <a:latin typeface="Segoe UI Semibold"/>
+                <a:latin typeface="Arial"/>
               </a:endParaRPr>
             </a:p>
           </p:txBody>
@@ -4094,7 +4352,7 @@
           <p:spPr>
             <a:xfrm>
               <a:off x="1728000" y="5220000"/>
-              <a:ext cx="540000" cy="180000"/>
+              <a:ext cx="539640" cy="179640"/>
             </a:xfrm>
             <a:prstGeom prst="rightArrow">
               <a:avLst>
@@ -4142,7 +4400,7 @@
           <p:spPr>
             <a:xfrm>
               <a:off x="3672000" y="5220000"/>
-              <a:ext cx="540000" cy="180000"/>
+              <a:ext cx="539640" cy="179640"/>
             </a:xfrm>
             <a:prstGeom prst="rightArrow">
               <a:avLst>
@@ -4190,7 +4448,7 @@
           <p:spPr>
             <a:xfrm>
               <a:off x="5652000" y="5220000"/>
-              <a:ext cx="540000" cy="180000"/>
+              <a:ext cx="539640" cy="179640"/>
             </a:xfrm>
             <a:prstGeom prst="rightArrow">
               <a:avLst>
@@ -4238,7 +4496,7 @@
           <p:spPr>
             <a:xfrm>
               <a:off x="7632000" y="5220000"/>
-              <a:ext cx="540000" cy="180000"/>
+              <a:ext cx="539640" cy="179640"/>
             </a:xfrm>
             <a:prstGeom prst="rightArrow">
               <a:avLst>
@@ -4281,13 +4539,13 @@
       <p:sp>
         <p:nvSpPr>
           <p:cNvPr id="58" name=""/>
-          <p:cNvSpPr txBox="1"/>
+          <p:cNvSpPr/>
           <p:nvPr/>
         </p:nvSpPr>
         <p:spPr>
           <a:xfrm>
             <a:off x="7740000" y="4436280"/>
-            <a:ext cx="2340000" cy="495720"/>
+            <a:ext cx="2339640" cy="495360"/>
           </a:xfrm>
           <a:prstGeom prst="rect">
             <a:avLst/>
@@ -4297,11 +4555,22 @@
             <a:noFill/>
           </a:ln>
         </p:spPr>
+        <p:style>
+          <a:lnRef idx="0"/>
+          <a:fillRef idx="0"/>
+          <a:effectRef idx="0"/>
+          <a:fontRef idx="minor"/>
+        </p:style>
         <p:txBody>
           <a:bodyPr lIns="90000" tIns="45000" rIns="90000" bIns="45000" anchor="t">
             <a:spAutoFit/>
           </a:bodyPr>
           <a:p>
+            <a:pPr>
+              <a:lnSpc>
+                <a:spcPct val="100000"/>
+              </a:lnSpc>
+            </a:pPr>
             <a:r>
               <a:rPr lang="it-IT" sz="1300" b="0" u="none" strike="noStrike">
                 <a:solidFill>
@@ -4349,13 +4618,13 @@
       <p:sp>
         <p:nvSpPr>
           <p:cNvPr id="59" name=""/>
-          <p:cNvSpPr txBox="1"/>
+          <p:cNvSpPr/>
           <p:nvPr/>
         </p:nvSpPr>
         <p:spPr>
           <a:xfrm>
             <a:off x="360000" y="1440000"/>
-            <a:ext cx="4680000" cy="2715120"/>
+            <a:ext cx="4679640" cy="2752560"/>
           </a:xfrm>
           <a:prstGeom prst="rect">
             <a:avLst/>
@@ -4365,12 +4634,21 @@
             <a:noFill/>
           </a:ln>
         </p:spPr>
+        <p:style>
+          <a:lnRef idx="0"/>
+          <a:fillRef idx="0"/>
+          <a:effectRef idx="0"/>
+          <a:fontRef idx="minor"/>
+        </p:style>
         <p:txBody>
           <a:bodyPr lIns="90000" tIns="45000" rIns="90000" bIns="45000" anchor="t">
             <a:spAutoFit/>
           </a:bodyPr>
           <a:p>
             <a:pPr marL="216000" indent="-216000">
+              <a:lnSpc>
+                <a:spcPct val="100000"/>
+              </a:lnSpc>
               <a:spcBef>
                 <a:spcPts val="1191"/>
               </a:spcBef>
@@ -4439,6 +4717,9 @@
           </a:p>
           <a:p>
             <a:pPr marL="216000" indent="-216000">
+              <a:lnSpc>
+                <a:spcPct val="100000"/>
+              </a:lnSpc>
               <a:spcBef>
                 <a:spcPts val="1191"/>
               </a:spcBef>
@@ -4494,7 +4775,7 @@
                 <a:uFillTx/>
                 <a:latin typeface="Segoe UI"/>
               </a:rPr>
-              <a:t>Field Parameters for on-the-fly metric switching, Shape Maps with risk gradients,  Drillthrough navigation, Year slicer and Page navigator</a:t>
+              <a:t>Field Parameters for on-the-fly metric switching, Shape Maps with risk gradients,  Drillthrough navigation, Year slicer and Page navigator.</a:t>
             </a:r>
             <a:endParaRPr lang="it-IT" sz="1300" b="0" u="none" strike="noStrike">
               <a:solidFill>
@@ -4507,6 +4788,9 @@
           </a:p>
           <a:p>
             <a:pPr marL="216000" indent="-216000">
+              <a:lnSpc>
+                <a:spcPct val="100000"/>
+              </a:lnSpc>
               <a:spcBef>
                 <a:spcPts val="1191"/>
               </a:spcBef>
@@ -4574,6 +4858,11 @@
             </a:endParaRPr>
           </a:p>
           <a:p>
+            <a:pPr>
+              <a:lnSpc>
+                <a:spcPct val="100000"/>
+              </a:lnSpc>
+            </a:pPr>
             <a:endParaRPr lang="it-IT" sz="1000" b="0" u="none" strike="noStrike">
               <a:solidFill>
                 <a:srgbClr val="000000"/>
@@ -4597,8 +4886,8 @@
         </p:blipFill>
         <p:spPr>
           <a:xfrm rot="21593400">
-            <a:off x="5041080" y="1261440"/>
-            <a:ext cx="2372400" cy="1334520"/>
+            <a:off x="5040720" y="1261080"/>
+            <a:ext cx="2372040" cy="1334160"/>
           </a:xfrm>
           <a:prstGeom prst="rect">
             <a:avLst/>
@@ -4622,7 +4911,7 @@
         <p:spPr>
           <a:xfrm>
             <a:off x="7560000" y="1260000"/>
-            <a:ext cx="2340000" cy="1313280"/>
+            <a:ext cx="2339640" cy="1312920"/>
           </a:xfrm>
           <a:prstGeom prst="rect">
             <a:avLst/>
@@ -4646,7 +4935,7 @@
         <p:spPr>
           <a:xfrm>
             <a:off x="6300000" y="2802960"/>
-            <a:ext cx="2700000" cy="1517040"/>
+            <a:ext cx="2699640" cy="1516680"/>
           </a:xfrm>
           <a:prstGeom prst="rect">
             <a:avLst/>
@@ -4660,13 +4949,13 @@
       <p:sp>
         <p:nvSpPr>
           <p:cNvPr id="63" name=""/>
-          <p:cNvSpPr txBox="1"/>
+          <p:cNvSpPr/>
           <p:nvPr/>
         </p:nvSpPr>
         <p:spPr>
           <a:xfrm>
             <a:off x="540000" y="4071240"/>
-            <a:ext cx="2880000" cy="428760"/>
+            <a:ext cx="2879640" cy="428400"/>
           </a:xfrm>
           <a:prstGeom prst="rect">
             <a:avLst/>
@@ -4676,11 +4965,22 @@
             <a:noFill/>
           </a:ln>
         </p:spPr>
+        <p:style>
+          <a:lnRef idx="0"/>
+          <a:fillRef idx="0"/>
+          <a:effectRef idx="0"/>
+          <a:fontRef idx="minor"/>
+        </p:style>
         <p:txBody>
           <a:bodyPr lIns="90000" tIns="45000" rIns="90000" bIns="45000" anchor="t">
             <a:spAutoFit/>
           </a:bodyPr>
           <a:p>
+            <a:pPr>
+              <a:lnSpc>
+                <a:spcPct val="100000"/>
+              </a:lnSpc>
+            </a:pPr>
             <a:r>
               <a:rPr lang="it-IT" sz="1000" b="0" u="none" strike="noStrike">
                 <a:solidFill>
@@ -4698,7 +4998,7 @@
               </a:solidFill>
               <a:effectLst/>
               <a:uFillTx/>
-              <a:latin typeface="Segoe UI"/>
+              <a:latin typeface="Arial"/>
             </a:endParaRPr>
           </a:p>
         </p:txBody>
@@ -4745,8 +5045,8 @@
         </p:nvSpPr>
         <p:spPr>
           <a:xfrm>
-            <a:off x="504000" y="225720"/>
-            <a:ext cx="9071640" cy="946440"/>
+            <a:off x="504000" y="225360"/>
+            <a:ext cx="9071280" cy="946800"/>
           </a:xfrm>
           <a:prstGeom prst="rect">
             <a:avLst/>
@@ -4764,7 +5064,13 @@
           </a:bodyPr>
           <a:p>
             <a:pPr indent="0" algn="ctr">
+              <a:lnSpc>
+                <a:spcPct val="100000"/>
+              </a:lnSpc>
               <a:buNone/>
+              <a:tabLst>
+                <a:tab pos="0" algn="l"/>
+              </a:tabLst>
             </a:pPr>
             <a:r>
               <a:rPr lang="it-IT" sz="3200" b="0" u="none" strike="noStrike">
@@ -4779,11 +5085,11 @@
             </a:r>
             <a:endParaRPr lang="it-IT" sz="3200" b="0" u="none" strike="noStrike">
               <a:solidFill>
-                <a:srgbClr val="FFFFFF"/>
+                <a:srgbClr val="000000"/>
               </a:solidFill>
               <a:effectLst/>
               <a:uFillTx/>
-              <a:latin typeface="Segoe UI Semibold"/>
+              <a:latin typeface="Arial"/>
             </a:endParaRPr>
           </a:p>
         </p:txBody>
@@ -4797,9 +5103,9 @@
         <p:grpSpPr>
           <a:xfrm>
             <a:off x="360000" y="5040000"/>
-            <a:ext cx="9180000" cy="540000"/>
+            <a:ext cx="9179640" cy="539640"/>
             <a:chOff x="360000" y="5040000"/>
-            <a:chExt cx="9180000" cy="540000"/>
+            <a:chExt cx="9179640" cy="539640"/>
           </a:xfrm>
         </p:grpSpPr>
         <p:sp>
@@ -4811,7 +5117,7 @@
           <p:spPr>
             <a:xfrm>
               <a:off x="360000" y="5040000"/>
-              <a:ext cx="1260000" cy="540000"/>
+              <a:ext cx="1259640" cy="539640"/>
             </a:xfrm>
             <a:prstGeom prst="rect">
               <a:avLst/>
@@ -4836,7 +5142,11 @@
               <a:noAutofit/>
             </a:bodyPr>
             <a:p>
-              <a:pPr algn="ctr"/>
+              <a:pPr algn="ctr">
+                <a:lnSpc>
+                  <a:spcPct val="100000"/>
+                </a:lnSpc>
+              </a:pPr>
               <a:r>
                 <a:rPr lang="it-IT" sz="1400" b="0" u="none" strike="noStrike">
                   <a:solidFill>
@@ -4845,6 +5155,7 @@
                   <a:effectLst/>
                   <a:uFillTx/>
                   <a:latin typeface="Segoe UI Semibold"/>
+                  <a:ea typeface="DejaVu Sans"/>
                 </a:rPr>
                 <a:t>Problem</a:t>
               </a:r>
@@ -4854,7 +5165,7 @@
                 </a:solidFill>
                 <a:effectLst/>
                 <a:uFillTx/>
-                <a:latin typeface="Segoe UI Semibold"/>
+                <a:latin typeface="Arial"/>
               </a:endParaRPr>
             </a:p>
           </p:txBody>
@@ -4868,7 +5179,7 @@
           <p:spPr>
             <a:xfrm>
               <a:off x="2340000" y="5040000"/>
-              <a:ext cx="1260000" cy="540000"/>
+              <a:ext cx="1259640" cy="539640"/>
             </a:xfrm>
             <a:prstGeom prst="rect">
               <a:avLst/>
@@ -4893,7 +5204,11 @@
               <a:noAutofit/>
             </a:bodyPr>
             <a:p>
-              <a:pPr algn="ctr"/>
+              <a:pPr algn="ctr">
+                <a:lnSpc>
+                  <a:spcPct val="100000"/>
+                </a:lnSpc>
+              </a:pPr>
               <a:r>
                 <a:rPr lang="it-IT" sz="1400" b="0" u="none" strike="noStrike">
                   <a:solidFill>
@@ -4902,6 +5217,7 @@
                   <a:effectLst/>
                   <a:uFillTx/>
                   <a:latin typeface="Segoe UI Semibold"/>
+                  <a:ea typeface="DejaVu Sans"/>
                 </a:rPr>
                 <a:t>Extract and Clean data</a:t>
               </a:r>
@@ -4911,7 +5227,7 @@
                 </a:solidFill>
                 <a:effectLst/>
                 <a:uFillTx/>
-                <a:latin typeface="Segoe UI Semibold"/>
+                <a:latin typeface="Arial"/>
               </a:endParaRPr>
             </a:p>
           </p:txBody>
@@ -4925,7 +5241,7 @@
           <p:spPr>
             <a:xfrm>
               <a:off x="4320000" y="5040000"/>
-              <a:ext cx="1260000" cy="540000"/>
+              <a:ext cx="1259640" cy="539640"/>
             </a:xfrm>
             <a:prstGeom prst="rect">
               <a:avLst/>
@@ -4950,7 +5266,11 @@
               <a:noAutofit/>
             </a:bodyPr>
             <a:p>
-              <a:pPr algn="ctr"/>
+              <a:pPr algn="ctr">
+                <a:lnSpc>
+                  <a:spcPct val="100000"/>
+                </a:lnSpc>
+              </a:pPr>
               <a:r>
                 <a:rPr lang="it-IT" sz="1400" b="0" u="none" strike="noStrike">
                   <a:solidFill>
@@ -4959,6 +5279,7 @@
                   <a:effectLst/>
                   <a:uFillTx/>
                   <a:latin typeface="Segoe UI Semibold"/>
+                  <a:ea typeface="DejaVu Sans"/>
                 </a:rPr>
                 <a:t>EDA and Clustering</a:t>
               </a:r>
@@ -4968,7 +5289,7 @@
                 </a:solidFill>
                 <a:effectLst/>
                 <a:uFillTx/>
-                <a:latin typeface="Segoe UI Semibold"/>
+                <a:latin typeface="Arial"/>
               </a:endParaRPr>
             </a:p>
           </p:txBody>
@@ -4982,7 +5303,7 @@
           <p:spPr>
             <a:xfrm>
               <a:off x="6300000" y="5040000"/>
-              <a:ext cx="1260000" cy="540000"/>
+              <a:ext cx="1259640" cy="539640"/>
             </a:xfrm>
             <a:prstGeom prst="rect">
               <a:avLst/>
@@ -5007,7 +5328,11 @@
               <a:noAutofit/>
             </a:bodyPr>
             <a:p>
-              <a:pPr algn="ctr"/>
+              <a:pPr algn="ctr">
+                <a:lnSpc>
+                  <a:spcPct val="100000"/>
+                </a:lnSpc>
+              </a:pPr>
               <a:r>
                 <a:rPr lang="it-IT" sz="1400" b="0" u="none" strike="noStrike">
                   <a:solidFill>
@@ -5016,6 +5341,7 @@
                   <a:effectLst/>
                   <a:uFillTx/>
                   <a:latin typeface="Segoe UI Semibold"/>
+                  <a:ea typeface="DejaVu Sans"/>
                 </a:rPr>
                 <a:t>Power Bi  Dashboard</a:t>
               </a:r>
@@ -5025,7 +5351,7 @@
                 </a:solidFill>
                 <a:effectLst/>
                 <a:uFillTx/>
-                <a:latin typeface="Segoe UI Semibold"/>
+                <a:latin typeface="Arial"/>
               </a:endParaRPr>
             </a:p>
           </p:txBody>
@@ -5039,7 +5365,7 @@
           <p:spPr>
             <a:xfrm>
               <a:off x="8280000" y="5040000"/>
-              <a:ext cx="1260000" cy="540000"/>
+              <a:ext cx="1259640" cy="539640"/>
             </a:xfrm>
             <a:prstGeom prst="rect">
               <a:avLst/>
@@ -5064,7 +5390,11 @@
               <a:noAutofit/>
             </a:bodyPr>
             <a:p>
-              <a:pPr algn="ctr"/>
+              <a:pPr algn="ctr">
+                <a:lnSpc>
+                  <a:spcPct val="100000"/>
+                </a:lnSpc>
+              </a:pPr>
               <a:r>
                 <a:rPr lang="it-IT" sz="1400" b="0" u="none" strike="noStrike">
                   <a:solidFill>
@@ -5073,6 +5403,7 @@
                   <a:effectLst/>
                   <a:uFillTx/>
                   <a:latin typeface="Segoe UI Semibold"/>
+                  <a:ea typeface="DejaVu Sans"/>
                 </a:rPr>
                 <a:t>Key Findings</a:t>
               </a:r>
@@ -5082,7 +5413,7 @@
                 </a:solidFill>
                 <a:effectLst/>
                 <a:uFillTx/>
-                <a:latin typeface="Segoe UI Semibold"/>
+                <a:latin typeface="Arial"/>
               </a:endParaRPr>
             </a:p>
           </p:txBody>
@@ -5096,7 +5427,7 @@
           <p:spPr>
             <a:xfrm>
               <a:off x="1728000" y="5220000"/>
-              <a:ext cx="540000" cy="180000"/>
+              <a:ext cx="539640" cy="179640"/>
             </a:xfrm>
             <a:prstGeom prst="rightArrow">
               <a:avLst>
@@ -5144,7 +5475,7 @@
           <p:spPr>
             <a:xfrm>
               <a:off x="3672000" y="5220000"/>
-              <a:ext cx="540000" cy="180000"/>
+              <a:ext cx="539640" cy="179640"/>
             </a:xfrm>
             <a:prstGeom prst="rightArrow">
               <a:avLst>
@@ -5192,7 +5523,7 @@
           <p:spPr>
             <a:xfrm>
               <a:off x="5652000" y="5220000"/>
-              <a:ext cx="540000" cy="180000"/>
+              <a:ext cx="539640" cy="179640"/>
             </a:xfrm>
             <a:prstGeom prst="rightArrow">
               <a:avLst>
@@ -5240,7 +5571,7 @@
           <p:spPr>
             <a:xfrm>
               <a:off x="7632000" y="5220000"/>
-              <a:ext cx="540000" cy="180000"/>
+              <a:ext cx="539640" cy="179640"/>
             </a:xfrm>
             <a:prstGeom prst="rightArrow">
               <a:avLst>
@@ -5283,13 +5614,13 @@
       <p:sp>
         <p:nvSpPr>
           <p:cNvPr id="75" name=""/>
-          <p:cNvSpPr txBox="1"/>
+          <p:cNvSpPr/>
           <p:nvPr/>
         </p:nvSpPr>
         <p:spPr>
           <a:xfrm>
             <a:off x="540000" y="1908000"/>
-            <a:ext cx="8820000" cy="2259360"/>
+            <a:ext cx="8819640" cy="2340720"/>
           </a:xfrm>
           <a:prstGeom prst="rect">
             <a:avLst/>
@@ -5299,12 +5630,21 @@
             <a:noFill/>
           </a:ln>
         </p:spPr>
+        <p:style>
+          <a:lnRef idx="0"/>
+          <a:fillRef idx="0"/>
+          <a:effectRef idx="0"/>
+          <a:fontRef idx="minor"/>
+        </p:style>
         <p:txBody>
           <a:bodyPr lIns="90000" tIns="45000" rIns="90000" bIns="45000" anchor="t">
             <a:spAutoFit/>
           </a:bodyPr>
           <a:p>
             <a:pPr marL="216000" indent="-216000">
+              <a:lnSpc>
+                <a:spcPct val="100000"/>
+              </a:lnSpc>
               <a:spcBef>
                 <a:spcPts val="1191"/>
               </a:spcBef>
@@ -5373,6 +5713,9 @@
           </a:p>
           <a:p>
             <a:pPr marL="216000" indent="-216000">
+              <a:lnSpc>
+                <a:spcPct val="100000"/>
+              </a:lnSpc>
               <a:spcBef>
                 <a:spcPts val="1191"/>
               </a:spcBef>
@@ -5441,6 +5784,9 @@
           </a:p>
           <a:p>
             <a:pPr marL="216000" indent="-216000">
+              <a:lnSpc>
+                <a:spcPct val="100000"/>
+              </a:lnSpc>
               <a:spcBef>
                 <a:spcPts val="1191"/>
               </a:spcBef>
@@ -5496,7 +5842,7 @@
                 <a:uFillTx/>
                 <a:latin typeface="Segoe UI"/>
               </a:rPr>
-              <a:t>A clear decline in accidents since 2001 (likely due to policy/awareness), accelerated further in 2020–2021 due to the COVID-19 pandemic, which drastically reduced traffic on the roads</a:t>
+              <a:t>A clear decline in accidents since 2001 (likely due to policy/awareness), accelerated further in 2020–2021 due to the COVID-19 pandemic, which drastically reduced traffic on the roads.</a:t>
             </a:r>
             <a:endParaRPr lang="it-IT" sz="1300" b="0" u="none" strike="noStrike">
               <a:solidFill>
@@ -5508,6 +5854,11 @@
             </a:endParaRPr>
           </a:p>
           <a:p>
+            <a:pPr>
+              <a:lnSpc>
+                <a:spcPct val="100000"/>
+              </a:lnSpc>
+            </a:pPr>
             <a:endParaRPr lang="it-IT" sz="1000" b="0" u="none" strike="noStrike">
               <a:solidFill>
                 <a:srgbClr val="000000"/>
